--- a/design-system/default/preview.pptx
+++ b/design-system/default/preview.pptx
@@ -10,12 +10,9 @@
     <p:sldId id="258" r:id="rId4"/>
     <p:sldId id="259" r:id="rId5"/>
     <p:sldId id="260" r:id="rId6"/>
-    <p:sldId id="261" r:id="rId7"/>
-    <p:sldId id="262" r:id="rId8"/>
-    <p:sldId id="263" r:id="rId9"/>
   </p:sldIdLst>
   <p:notesMasterIdLst>
-    <p:notesMasterId r:id="rId10"/>
+    <p:notesMasterId r:id="rId7"/>
   </p:notesMasterIdLst>
   <p:sldSz cx="9144000" cy="5143500"/>
   <p:notesSz cx="5143500" cy="9144000"/>
@@ -885,270 +882,6 @@
             <a:fld id="{F7021451-1387-4CA6-816F-3879F97B5CBC}" type="slidenum">
               <a:rPr lang="en-US"/>
               <a:t>5</a:t>
-            </a:fld>
-            <a:endParaRPr lang="en-US"/>
-          </a:p>
-        </p:txBody>
-      </p:sp>
-    </p:spTree>
-    <p:extLst>
-      <p:ext uri="{BB962C8B-B14F-4D97-AF65-F5344CB8AC3E}">
-        <p14:creationId xmlns:p14="http://schemas.microsoft.com/office/powerpoint/2010/main" val="1024086991"/>
-      </p:ext>
-    </p:extLst>
-  </p:cSld>
-  <p:clrMapOvr>
-    <a:masterClrMapping/>
-  </p:clrMapOvr>
-</p:notes>
-</file>
-
-<file path=ppt/notesSlides/notesSlide6.xml><?xml version="1.0" encoding="utf-8"?>
-<p:notes xmlns:a="http://schemas.openxmlformats.org/drawingml/2006/main" xmlns:r="http://schemas.openxmlformats.org/officeDocument/2006/relationships" xmlns:p="http://schemas.openxmlformats.org/presentationml/2006/main">
-  <p:cSld>
-    <p:spTree>
-      <p:nvGrpSpPr>
-        <p:cNvPr id="1" name=""/>
-        <p:cNvGrpSpPr/>
-        <p:nvPr/>
-      </p:nvGrpSpPr>
-      <p:grpSpPr>
-        <a:xfrm>
-          <a:off x="0" y="0"/>
-          <a:ext cx="0" cy="0"/>
-          <a:chOff x="0" y="0"/>
-          <a:chExt cx="0" cy="0"/>
-        </a:xfrm>
-      </p:grpSpPr>
-      <p:sp>
-        <p:nvSpPr>
-          <p:cNvPr id="2" name="Slide Image Placeholder 1"/>
-          <p:cNvSpPr>
-            <a:spLocks noGrp="1" noRot="1" noChangeAspect="1"/>
-          </p:cNvSpPr>
-          <p:nvPr>
-            <p:ph type="sldImg"/>
-          </p:nvPr>
-        </p:nvSpPr>
-        <p:spPr/>
-      </p:sp>
-      <p:sp>
-        <p:nvSpPr>
-          <p:cNvPr id="3" name="Notes Placeholder 2"/>
-          <p:cNvSpPr>
-            <a:spLocks noGrp="1"/>
-          </p:cNvSpPr>
-          <p:nvPr>
-            <p:ph type="body" idx="1"/>
-          </p:nvPr>
-        </p:nvSpPr>
-        <p:spPr/>
-        <p:txBody>
-          <a:bodyPr/>
-          <a:lstStyle/>
-          <a:p>
-            <a:r>
-              <a:rPr lang="en-US" dirty="0"/>
-              <a:t/>
-            </a:r>
-            <a:endParaRPr lang="en-US" dirty="0"/>
-          </a:p>
-        </p:txBody>
-      </p:sp>
-      <p:sp>
-        <p:nvSpPr>
-          <p:cNvPr id="4" name="Slide Number Placeholder 3"/>
-          <p:cNvSpPr>
-            <a:spLocks noGrp="1"/>
-          </p:cNvSpPr>
-          <p:nvPr>
-            <p:ph type="sldNum" sz="quarter" idx="10"/>
-          </p:nvPr>
-        </p:nvSpPr>
-        <p:spPr/>
-        <p:txBody>
-          <a:bodyPr/>
-          <a:lstStyle/>
-          <a:p>
-            <a:fld id="{F7021451-1387-4CA6-816F-3879F97B5CBC}" type="slidenum">
-              <a:rPr lang="en-US"/>
-              <a:t>6</a:t>
-            </a:fld>
-            <a:endParaRPr lang="en-US"/>
-          </a:p>
-        </p:txBody>
-      </p:sp>
-    </p:spTree>
-    <p:extLst>
-      <p:ext uri="{BB962C8B-B14F-4D97-AF65-F5344CB8AC3E}">
-        <p14:creationId xmlns:p14="http://schemas.microsoft.com/office/powerpoint/2010/main" val="1024086991"/>
-      </p:ext>
-    </p:extLst>
-  </p:cSld>
-  <p:clrMapOvr>
-    <a:masterClrMapping/>
-  </p:clrMapOvr>
-</p:notes>
-</file>
-
-<file path=ppt/notesSlides/notesSlide7.xml><?xml version="1.0" encoding="utf-8"?>
-<p:notes xmlns:a="http://schemas.openxmlformats.org/drawingml/2006/main" xmlns:r="http://schemas.openxmlformats.org/officeDocument/2006/relationships" xmlns:p="http://schemas.openxmlformats.org/presentationml/2006/main">
-  <p:cSld>
-    <p:spTree>
-      <p:nvGrpSpPr>
-        <p:cNvPr id="1" name=""/>
-        <p:cNvGrpSpPr/>
-        <p:nvPr/>
-      </p:nvGrpSpPr>
-      <p:grpSpPr>
-        <a:xfrm>
-          <a:off x="0" y="0"/>
-          <a:ext cx="0" cy="0"/>
-          <a:chOff x="0" y="0"/>
-          <a:chExt cx="0" cy="0"/>
-        </a:xfrm>
-      </p:grpSpPr>
-      <p:sp>
-        <p:nvSpPr>
-          <p:cNvPr id="2" name="Slide Image Placeholder 1"/>
-          <p:cNvSpPr>
-            <a:spLocks noGrp="1" noRot="1" noChangeAspect="1"/>
-          </p:cNvSpPr>
-          <p:nvPr>
-            <p:ph type="sldImg"/>
-          </p:nvPr>
-        </p:nvSpPr>
-        <p:spPr/>
-      </p:sp>
-      <p:sp>
-        <p:nvSpPr>
-          <p:cNvPr id="3" name="Notes Placeholder 2"/>
-          <p:cNvSpPr>
-            <a:spLocks noGrp="1"/>
-          </p:cNvSpPr>
-          <p:nvPr>
-            <p:ph type="body" idx="1"/>
-          </p:nvPr>
-        </p:nvSpPr>
-        <p:spPr/>
-        <p:txBody>
-          <a:bodyPr/>
-          <a:lstStyle/>
-          <a:p>
-            <a:r>
-              <a:rPr lang="en-US" dirty="0"/>
-              <a:t/>
-            </a:r>
-            <a:endParaRPr lang="en-US" dirty="0"/>
-          </a:p>
-        </p:txBody>
-      </p:sp>
-      <p:sp>
-        <p:nvSpPr>
-          <p:cNvPr id="4" name="Slide Number Placeholder 3"/>
-          <p:cNvSpPr>
-            <a:spLocks noGrp="1"/>
-          </p:cNvSpPr>
-          <p:nvPr>
-            <p:ph type="sldNum" sz="quarter" idx="10"/>
-          </p:nvPr>
-        </p:nvSpPr>
-        <p:spPr/>
-        <p:txBody>
-          <a:bodyPr/>
-          <a:lstStyle/>
-          <a:p>
-            <a:fld id="{F7021451-1387-4CA6-816F-3879F97B5CBC}" type="slidenum">
-              <a:rPr lang="en-US"/>
-              <a:t>7</a:t>
-            </a:fld>
-            <a:endParaRPr lang="en-US"/>
-          </a:p>
-        </p:txBody>
-      </p:sp>
-    </p:spTree>
-    <p:extLst>
-      <p:ext uri="{BB962C8B-B14F-4D97-AF65-F5344CB8AC3E}">
-        <p14:creationId xmlns:p14="http://schemas.microsoft.com/office/powerpoint/2010/main" val="1024086991"/>
-      </p:ext>
-    </p:extLst>
-  </p:cSld>
-  <p:clrMapOvr>
-    <a:masterClrMapping/>
-  </p:clrMapOvr>
-</p:notes>
-</file>
-
-<file path=ppt/notesSlides/notesSlide8.xml><?xml version="1.0" encoding="utf-8"?>
-<p:notes xmlns:a="http://schemas.openxmlformats.org/drawingml/2006/main" xmlns:r="http://schemas.openxmlformats.org/officeDocument/2006/relationships" xmlns:p="http://schemas.openxmlformats.org/presentationml/2006/main">
-  <p:cSld>
-    <p:spTree>
-      <p:nvGrpSpPr>
-        <p:cNvPr id="1" name=""/>
-        <p:cNvGrpSpPr/>
-        <p:nvPr/>
-      </p:nvGrpSpPr>
-      <p:grpSpPr>
-        <a:xfrm>
-          <a:off x="0" y="0"/>
-          <a:ext cx="0" cy="0"/>
-          <a:chOff x="0" y="0"/>
-          <a:chExt cx="0" cy="0"/>
-        </a:xfrm>
-      </p:grpSpPr>
-      <p:sp>
-        <p:nvSpPr>
-          <p:cNvPr id="2" name="Slide Image Placeholder 1"/>
-          <p:cNvSpPr>
-            <a:spLocks noGrp="1" noRot="1" noChangeAspect="1"/>
-          </p:cNvSpPr>
-          <p:nvPr>
-            <p:ph type="sldImg"/>
-          </p:nvPr>
-        </p:nvSpPr>
-        <p:spPr/>
-      </p:sp>
-      <p:sp>
-        <p:nvSpPr>
-          <p:cNvPr id="3" name="Notes Placeholder 2"/>
-          <p:cNvSpPr>
-            <a:spLocks noGrp="1"/>
-          </p:cNvSpPr>
-          <p:nvPr>
-            <p:ph type="body" idx="1"/>
-          </p:nvPr>
-        </p:nvSpPr>
-        <p:spPr/>
-        <p:txBody>
-          <a:bodyPr/>
-          <a:lstStyle/>
-          <a:p>
-            <a:r>
-              <a:rPr lang="en-US" dirty="0"/>
-              <a:t/>
-            </a:r>
-            <a:endParaRPr lang="en-US" dirty="0"/>
-          </a:p>
-        </p:txBody>
-      </p:sp>
-      <p:sp>
-        <p:nvSpPr>
-          <p:cNvPr id="4" name="Slide Number Placeholder 3"/>
-          <p:cNvSpPr>
-            <a:spLocks noGrp="1"/>
-          </p:cNvSpPr>
-          <p:nvPr>
-            <p:ph type="sldNum" sz="quarter" idx="10"/>
-          </p:nvPr>
-        </p:nvSpPr>
-        <p:spPr/>
-        <p:txBody>
-          <a:bodyPr/>
-          <a:lstStyle/>
-          <a:p>
-            <a:fld id="{F7021451-1387-4CA6-816F-3879F97B5CBC}" type="slidenum">
-              <a:rPr lang="en-US"/>
-              <a:t>8</a:t>
             </a:fld>
             <a:endParaRPr lang="en-US"/>
           </a:p>
@@ -1934,7 +1667,7 @@
                 <a:ea typeface="Noto Sans JP" pitchFamily="34" charset="-122"/>
                 <a:cs typeface="Noto Sans JP" pitchFamily="34" charset="-120"/>
               </a:rPr>
-              <a:t>固定プリミティブに当てはまらない内容はpptx-buildが都度自由に設計する</a:t>
+              <a:t>定型スライドに当てはまらない内容はpptx-buildが都度自由に設計する</a:t>
             </a:r>
             <a:endParaRPr lang="en-US" sz="1400" dirty="0"/>
           </a:p>
@@ -2061,8 +1794,8 @@
         </p:nvSpPr>
         <p:spPr>
           <a:xfrm>
-            <a:off x="548640" y="457200"/>
-            <a:ext cx="2825763" cy="329184"/>
+            <a:off x="0" y="0"/>
+            <a:ext cx="3291840" cy="5143500"/>
           </a:xfrm>
           <a:prstGeom prst="rect">
             <a:avLst/>
@@ -2081,8 +1814,8 @@
         </p:nvSpPr>
         <p:spPr>
           <a:xfrm>
-            <a:off x="713232" y="457200"/>
-            <a:ext cx="2496579" cy="329184"/>
+            <a:off x="457200" y="1543050"/>
+            <a:ext cx="2377440" cy="640080"/>
           </a:xfrm>
           <a:prstGeom prst="rect">
             <a:avLst/>
@@ -2091,14 +1824,14 @@
           <a:ln/>
         </p:spPr>
         <p:txBody>
-          <a:bodyPr wrap="none" lIns="0" tIns="0" rIns="0" bIns="0" rtlCol="0" anchor="ctr"/>
+          <a:bodyPr wrap="square" rtlCol="0" anchor="ctr"/>
           <a:lstStyle/>
           <a:p>
             <a:pPr indent="0" marL="0">
               <a:buNone/>
             </a:pPr>
             <a:r>
-              <a:rPr lang="en-US" sz="1400" b="1" dirty="0">
+              <a:rPr lang="en-US" sz="2400" b="1" dirty="0">
                 <a:solidFill>
                   <a:srgbClr val="FFFFFF"/>
                 </a:solidFill>
@@ -2106,42 +1839,22 @@
                 <a:ea typeface="Noto Sans JP" pitchFamily="34" charset="-122"/>
                 <a:cs typeface="Noto Sans JP" pitchFamily="34" charset="-120"/>
               </a:rPr>
-              <a:t>対等な要素の列挙(3件)</a:t>
-            </a:r>
-            <a:endParaRPr lang="en-US" sz="1400" dirty="0"/>
-          </a:p>
-        </p:txBody>
-      </p:sp>
-      <p:sp>
-        <p:nvSpPr>
-          <p:cNvPr id="4" name="Shape 2"/>
+              <a:t>テキスト+画像</a:t>
+            </a:r>
+            <a:endParaRPr lang="en-US" sz="2400" dirty="0"/>
+          </a:p>
+        </p:txBody>
+      </p:sp>
+      <p:sp>
+        <p:nvSpPr>
+          <p:cNvPr id="4" name="Text 2"/>
           <p:cNvSpPr/>
           <p:nvPr/>
         </p:nvSpPr>
         <p:spPr>
           <a:xfrm>
-            <a:off x="548640" y="932688"/>
-            <a:ext cx="2499360" cy="3342132"/>
-          </a:xfrm>
-          <a:prstGeom prst="rect">
-            <a:avLst/>
-          </a:prstGeom>
-          <a:solidFill>
-            <a:srgbClr val="F3F3F3"/>
-          </a:solidFill>
-          <a:ln/>
-        </p:spPr>
-      </p:sp>
-      <p:sp>
-        <p:nvSpPr>
-          <p:cNvPr id="5" name="Text 3"/>
-          <p:cNvSpPr/>
-          <p:nvPr/>
-        </p:nvSpPr>
-        <p:spPr>
-          <a:xfrm>
-            <a:off x="731520" y="1042416"/>
-            <a:ext cx="2133600" cy="320040"/>
+            <a:off x="457200" y="2228850"/>
+            <a:ext cx="2377440" cy="2314575"/>
           </a:xfrm>
           <a:prstGeom prst="rect">
             <a:avLst/>
@@ -2150,63 +1863,47 @@
           <a:ln/>
         </p:spPr>
         <p:txBody>
-          <a:bodyPr wrap="square" rtlCol="0" anchor="ctr"/>
-          <a:lstStyle/>
-          <a:p>
-            <a:pPr indent="0" marL="0">
-              <a:buNone/>
+          <a:bodyPr wrap="square" rtlCol="0" anchor="t"/>
+          <a:lstStyle/>
+          <a:p>
+            <a:pPr marL="228600" indent="-228600">
+              <a:spcAft>
+                <a:spcPts val="800"/>
+              </a:spcAft>
+              <a:buSzPct val="100000"/>
+              <a:buChar char="•"/>
             </a:pPr>
             <a:r>
-              <a:rPr lang="en-US" sz="2400" b="1" dirty="0">
+              <a:rPr lang="en-US" sz="1400" dirty="0">
                 <a:solidFill>
-                  <a:srgbClr val="15803D">
-                    <a:alpha val="45000"/>
-                  </a:srgbClr>
+                  <a:srgbClr val="FFFFFF"/>
                 </a:solidFill>
                 <a:latin typeface="Noto Sans JP" pitchFamily="34" charset="0"/>
                 <a:ea typeface="Noto Sans JP" pitchFamily="34" charset="-122"/>
                 <a:cs typeface="Noto Sans JP" pitchFamily="34" charset="-120"/>
               </a:rPr>
-              <a:t>01</a:t>
-            </a:r>
-            <a:endParaRPr lang="en-US" sz="2400" dirty="0"/>
-          </a:p>
-        </p:txBody>
-      </p:sp>
-      <p:sp>
-        <p:nvSpPr>
-          <p:cNvPr id="6" name="Text 4"/>
-          <p:cNvSpPr/>
-          <p:nvPr/>
-        </p:nvSpPr>
-        <p:spPr>
-          <a:xfrm>
-            <a:off x="731520" y="1389888"/>
-            <a:ext cx="2133600" cy="365760"/>
-          </a:xfrm>
-          <a:prstGeom prst="rect">
-            <a:avLst/>
-          </a:prstGeom>
-          <a:noFill/>
-          <a:ln/>
-        </p:spPr>
-        <p:txBody>
-          <a:bodyPr wrap="square" rtlCol="0" anchor="ctr"/>
-          <a:lstStyle/>
-          <a:p>
-            <a:pPr indent="0" marL="0">
-              <a:buNone/>
+              <a:t>画像を大きく、テキストは短く要点だけ</a:t>
+            </a:r>
+            <a:endParaRPr lang="en-US" sz="1400" dirty="0"/>
+          </a:p>
+          <a:p>
+            <a:pPr marL="228600" indent="-228600">
+              <a:spcAft>
+                <a:spcPts val="800"/>
+              </a:spcAft>
+              <a:buSzPct val="100000"/>
+              <a:buChar char="•"/>
             </a:pPr>
             <a:r>
-              <a:rPr lang="en-US" sz="1400" b="1" dirty="0">
+              <a:rPr lang="en-US" sz="1400" dirty="0">
                 <a:solidFill>
-                  <a:srgbClr val="434343"/>
+                  <a:srgbClr val="FFFFFF"/>
                 </a:solidFill>
                 <a:latin typeface="Noto Sans JP" pitchFamily="34" charset="0"/>
                 <a:ea typeface="Noto Sans JP" pitchFamily="34" charset="-122"/>
                 <a:cs typeface="Noto Sans JP" pitchFamily="34" charset="-120"/>
               </a:rPr>
-              <a:t>特徴A</a:t>
+              <a:t>非対称ペアとして扱う</a:t>
             </a:r>
             <a:endParaRPr lang="en-US" sz="1400" dirty="0"/>
           </a:p>
@@ -2214,14 +1911,39 @@
       </p:sp>
       <p:sp>
         <p:nvSpPr>
-          <p:cNvPr id="7" name="Text 5"/>
+          <p:cNvPr id="5" name="Shape 3"/>
           <p:cNvSpPr/>
           <p:nvPr/>
         </p:nvSpPr>
         <p:spPr>
           <a:xfrm>
-            <a:off x="731520" y="1755648"/>
-            <a:ext cx="2133600" cy="2382012"/>
+            <a:off x="3291840" y="0"/>
+            <a:ext cx="5852160" cy="5143500"/>
+          </a:xfrm>
+          <a:prstGeom prst="rect">
+            <a:avLst/>
+          </a:prstGeom>
+          <a:solidFill>
+            <a:srgbClr val="F3F3F3"/>
+          </a:solidFill>
+          <a:ln w="15875">
+            <a:solidFill>
+              <a:srgbClr val="D9D9D9"/>
+            </a:solidFill>
+            <a:prstDash val="dash"/>
+          </a:ln>
+        </p:spPr>
+      </p:sp>
+      <p:sp>
+        <p:nvSpPr>
+          <p:cNvPr id="6" name="Text 4"/>
+          <p:cNvSpPr/>
+          <p:nvPr/>
+        </p:nvSpPr>
+        <p:spPr>
+          <a:xfrm>
+            <a:off x="3291840" y="0"/>
+            <a:ext cx="5852160" cy="5143500"/>
           </a:xfrm>
           <a:prstGeom prst="rect">
             <a:avLst/>
@@ -2230,14 +1952,14 @@
           <a:ln/>
         </p:spPr>
         <p:txBody>
-          <a:bodyPr wrap="square" rtlCol="0" anchor="t"/>
-          <a:lstStyle/>
-          <a:p>
-            <a:pPr indent="0" marL="0">
+          <a:bodyPr wrap="square" rtlCol="0" anchor="ctr"/>
+          <a:lstStyle/>
+          <a:p>
+            <a:pPr algn="ctr" indent="0" marL="0">
               <a:buNone/>
             </a:pPr>
             <a:r>
-              <a:rPr lang="en-US" sz="1200" dirty="0">
+              <a:rPr lang="en-US" sz="1400" dirty="0">
                 <a:solidFill>
                   <a:srgbClr val="595959"/>
                 </a:solidFill>
@@ -2245,107 +1967,7 @@
                 <a:ea typeface="Noto Sans JP" pitchFamily="34" charset="-122"/>
                 <a:cs typeface="Noto Sans JP" pitchFamily="34" charset="-120"/>
               </a:rPr>
-              <a:t>説明文A</a:t>
-            </a:r>
-            <a:endParaRPr lang="en-US" sz="1200" dirty="0"/>
-          </a:p>
-        </p:txBody>
-      </p:sp>
-      <p:sp>
-        <p:nvSpPr>
-          <p:cNvPr id="8" name="Shape 6"/>
-          <p:cNvSpPr/>
-          <p:nvPr/>
-        </p:nvSpPr>
-        <p:spPr>
-          <a:xfrm>
-            <a:off x="3322320" y="932688"/>
-            <a:ext cx="2499360" cy="3342132"/>
-          </a:xfrm>
-          <a:prstGeom prst="rect">
-            <a:avLst/>
-          </a:prstGeom>
-          <a:solidFill>
-            <a:srgbClr val="F3F3F3"/>
-          </a:solidFill>
-          <a:ln/>
-        </p:spPr>
-      </p:sp>
-      <p:sp>
-        <p:nvSpPr>
-          <p:cNvPr id="9" name="Text 7"/>
-          <p:cNvSpPr/>
-          <p:nvPr/>
-        </p:nvSpPr>
-        <p:spPr>
-          <a:xfrm>
-            <a:off x="3505200" y="1042416"/>
-            <a:ext cx="2133600" cy="320040"/>
-          </a:xfrm>
-          <a:prstGeom prst="rect">
-            <a:avLst/>
-          </a:prstGeom>
-          <a:noFill/>
-          <a:ln/>
-        </p:spPr>
-        <p:txBody>
-          <a:bodyPr wrap="square" rtlCol="0" anchor="ctr"/>
-          <a:lstStyle/>
-          <a:p>
-            <a:pPr indent="0" marL="0">
-              <a:buNone/>
-            </a:pPr>
-            <a:r>
-              <a:rPr lang="en-US" sz="2400" b="1" dirty="0">
-                <a:solidFill>
-                  <a:srgbClr val="15803D">
-                    <a:alpha val="45000"/>
-                  </a:srgbClr>
-                </a:solidFill>
-                <a:latin typeface="Noto Sans JP" pitchFamily="34" charset="0"/>
-                <a:ea typeface="Noto Sans JP" pitchFamily="34" charset="-122"/>
-                <a:cs typeface="Noto Sans JP" pitchFamily="34" charset="-120"/>
-              </a:rPr>
-              <a:t>02</a:t>
-            </a:r>
-            <a:endParaRPr lang="en-US" sz="2400" dirty="0"/>
-          </a:p>
-        </p:txBody>
-      </p:sp>
-      <p:sp>
-        <p:nvSpPr>
-          <p:cNvPr id="10" name="Text 8"/>
-          <p:cNvSpPr/>
-          <p:nvPr/>
-        </p:nvSpPr>
-        <p:spPr>
-          <a:xfrm>
-            <a:off x="3505200" y="1389888"/>
-            <a:ext cx="2133600" cy="365760"/>
-          </a:xfrm>
-          <a:prstGeom prst="rect">
-            <a:avLst/>
-          </a:prstGeom>
-          <a:noFill/>
-          <a:ln/>
-        </p:spPr>
-        <p:txBody>
-          <a:bodyPr wrap="square" rtlCol="0" anchor="ctr"/>
-          <a:lstStyle/>
-          <a:p>
-            <a:pPr indent="0" marL="0">
-              <a:buNone/>
-            </a:pPr>
-            <a:r>
-              <a:rPr lang="en-US" sz="1400" b="1" dirty="0">
-                <a:solidFill>
-                  <a:srgbClr val="434343"/>
-                </a:solidFill>
-                <a:latin typeface="Noto Sans JP" pitchFamily="34" charset="0"/>
-                <a:ea typeface="Noto Sans JP" pitchFamily="34" charset="-122"/>
-                <a:cs typeface="Noto Sans JP" pitchFamily="34" charset="-120"/>
-              </a:rPr>
-              <a:t>特徴B</a:t>
+              <a:t>IMAGE PLACEHOLDER</a:t>
             </a:r>
             <a:endParaRPr lang="en-US" sz="1400" dirty="0"/>
           </a:p>
@@ -2353,185 +1975,7 @@
       </p:sp>
       <p:sp>
         <p:nvSpPr>
-          <p:cNvPr id="11" name="Text 9"/>
-          <p:cNvSpPr/>
-          <p:nvPr/>
-        </p:nvSpPr>
-        <p:spPr>
-          <a:xfrm>
-            <a:off x="3505200" y="1755648"/>
-            <a:ext cx="2133600" cy="2382012"/>
-          </a:xfrm>
-          <a:prstGeom prst="rect">
-            <a:avLst/>
-          </a:prstGeom>
-          <a:noFill/>
-          <a:ln/>
-        </p:spPr>
-        <p:txBody>
-          <a:bodyPr wrap="square" rtlCol="0" anchor="t"/>
-          <a:lstStyle/>
-          <a:p>
-            <a:pPr indent="0" marL="0">
-              <a:buNone/>
-            </a:pPr>
-            <a:r>
-              <a:rPr lang="en-US" sz="1200" dirty="0">
-                <a:solidFill>
-                  <a:srgbClr val="595959"/>
-                </a:solidFill>
-                <a:latin typeface="Noto Sans JP" pitchFamily="34" charset="0"/>
-                <a:ea typeface="Noto Sans JP" pitchFamily="34" charset="-122"/>
-                <a:cs typeface="Noto Sans JP" pitchFamily="34" charset="-120"/>
-              </a:rPr>
-              <a:t>説明文B</a:t>
-            </a:r>
-            <a:endParaRPr lang="en-US" sz="1200" dirty="0"/>
-          </a:p>
-        </p:txBody>
-      </p:sp>
-      <p:sp>
-        <p:nvSpPr>
-          <p:cNvPr id="12" name="Shape 10"/>
-          <p:cNvSpPr/>
-          <p:nvPr/>
-        </p:nvSpPr>
-        <p:spPr>
-          <a:xfrm>
-            <a:off x="6096000" y="932688"/>
-            <a:ext cx="2499360" cy="3342132"/>
-          </a:xfrm>
-          <a:prstGeom prst="rect">
-            <a:avLst/>
-          </a:prstGeom>
-          <a:solidFill>
-            <a:srgbClr val="F3F3F3"/>
-          </a:solidFill>
-          <a:ln/>
-        </p:spPr>
-      </p:sp>
-      <p:sp>
-        <p:nvSpPr>
-          <p:cNvPr id="13" name="Text 11"/>
-          <p:cNvSpPr/>
-          <p:nvPr/>
-        </p:nvSpPr>
-        <p:spPr>
-          <a:xfrm>
-            <a:off x="6278880" y="1042416"/>
-            <a:ext cx="2133600" cy="320040"/>
-          </a:xfrm>
-          <a:prstGeom prst="rect">
-            <a:avLst/>
-          </a:prstGeom>
-          <a:noFill/>
-          <a:ln/>
-        </p:spPr>
-        <p:txBody>
-          <a:bodyPr wrap="square" rtlCol="0" anchor="ctr"/>
-          <a:lstStyle/>
-          <a:p>
-            <a:pPr indent="0" marL="0">
-              <a:buNone/>
-            </a:pPr>
-            <a:r>
-              <a:rPr lang="en-US" sz="2400" b="1" dirty="0">
-                <a:solidFill>
-                  <a:srgbClr val="15803D">
-                    <a:alpha val="45000"/>
-                  </a:srgbClr>
-                </a:solidFill>
-                <a:latin typeface="Noto Sans JP" pitchFamily="34" charset="0"/>
-                <a:ea typeface="Noto Sans JP" pitchFamily="34" charset="-122"/>
-                <a:cs typeface="Noto Sans JP" pitchFamily="34" charset="-120"/>
-              </a:rPr>
-              <a:t>03</a:t>
-            </a:r>
-            <a:endParaRPr lang="en-US" sz="2400" dirty="0"/>
-          </a:p>
-        </p:txBody>
-      </p:sp>
-      <p:sp>
-        <p:nvSpPr>
-          <p:cNvPr id="14" name="Text 12"/>
-          <p:cNvSpPr/>
-          <p:nvPr/>
-        </p:nvSpPr>
-        <p:spPr>
-          <a:xfrm>
-            <a:off x="6278880" y="1389888"/>
-            <a:ext cx="2133600" cy="365760"/>
-          </a:xfrm>
-          <a:prstGeom prst="rect">
-            <a:avLst/>
-          </a:prstGeom>
-          <a:noFill/>
-          <a:ln/>
-        </p:spPr>
-        <p:txBody>
-          <a:bodyPr wrap="square" rtlCol="0" anchor="ctr"/>
-          <a:lstStyle/>
-          <a:p>
-            <a:pPr indent="0" marL="0">
-              <a:buNone/>
-            </a:pPr>
-            <a:r>
-              <a:rPr lang="en-US" sz="1400" b="1" dirty="0">
-                <a:solidFill>
-                  <a:srgbClr val="434343"/>
-                </a:solidFill>
-                <a:latin typeface="Noto Sans JP" pitchFamily="34" charset="0"/>
-                <a:ea typeface="Noto Sans JP" pitchFamily="34" charset="-122"/>
-                <a:cs typeface="Noto Sans JP" pitchFamily="34" charset="-120"/>
-              </a:rPr>
-              <a:t>特徴C</a:t>
-            </a:r>
-            <a:endParaRPr lang="en-US" sz="1400" dirty="0"/>
-          </a:p>
-        </p:txBody>
-      </p:sp>
-      <p:sp>
-        <p:nvSpPr>
-          <p:cNvPr id="15" name="Text 13"/>
-          <p:cNvSpPr/>
-          <p:nvPr/>
-        </p:nvSpPr>
-        <p:spPr>
-          <a:xfrm>
-            <a:off x="6278880" y="1755648"/>
-            <a:ext cx="2133600" cy="2382012"/>
-          </a:xfrm>
-          <a:prstGeom prst="rect">
-            <a:avLst/>
-          </a:prstGeom>
-          <a:noFill/>
-          <a:ln/>
-        </p:spPr>
-        <p:txBody>
-          <a:bodyPr wrap="square" rtlCol="0" anchor="t"/>
-          <a:lstStyle/>
-          <a:p>
-            <a:pPr indent="0" marL="0">
-              <a:buNone/>
-            </a:pPr>
-            <a:r>
-              <a:rPr lang="en-US" sz="1200" dirty="0">
-                <a:solidFill>
-                  <a:srgbClr val="595959"/>
-                </a:solidFill>
-                <a:latin typeface="Noto Sans JP" pitchFamily="34" charset="0"/>
-                <a:ea typeface="Noto Sans JP" pitchFamily="34" charset="-122"/>
-                <a:cs typeface="Noto Sans JP" pitchFamily="34" charset="-120"/>
-              </a:rPr>
-              <a:t>説明文C</a:t>
-            </a:r>
-            <a:endParaRPr lang="en-US" sz="1200" dirty="0"/>
-          </a:p>
-        </p:txBody>
-      </p:sp>
-      <p:sp>
-        <p:nvSpPr>
-          <p:cNvPr id="16" name="Text 14"/>
+          <p:cNvPr id="7" name="Text 5"/>
           <p:cNvSpPr/>
           <p:nvPr/>
         </p:nvSpPr>
@@ -2579,1513 +2023,6 @@
 <file path=ppt/slides/slide5.xml><?xml version="1.0" encoding="utf-8"?>
 <p:sld xmlns:a="http://schemas.openxmlformats.org/drawingml/2006/main" xmlns:r="http://schemas.openxmlformats.org/officeDocument/2006/relationships" xmlns:p="http://schemas.openxmlformats.org/presentationml/2006/main">
   <p:cSld name="Slide 5">
-    <p:bg>
-      <p:bgPr>
-        <a:solidFill>
-          <a:srgbClr val="FFFFFF"/>
-        </a:solidFill>
-      </p:bgPr>
-    </p:bg>
-    <p:spTree>
-      <p:nvGrpSpPr>
-        <p:cNvPr id="1" name=""/>
-        <p:cNvGrpSpPr/>
-        <p:nvPr/>
-      </p:nvGrpSpPr>
-      <p:grpSpPr>
-        <a:xfrm>
-          <a:off x="0" y="0"/>
-          <a:ext cx="0" cy="0"/>
-          <a:chOff x="0" y="0"/>
-          <a:chExt cx="0" cy="0"/>
-        </a:xfrm>
-      </p:grpSpPr>
-      <p:sp>
-        <p:nvSpPr>
-          <p:cNvPr id="2" name="Shape 0"/>
-          <p:cNvSpPr/>
-          <p:nvPr/>
-        </p:nvSpPr>
-        <p:spPr>
-          <a:xfrm>
-            <a:off x="548640" y="457200"/>
-            <a:ext cx="2825763" cy="329184"/>
-          </a:xfrm>
-          <a:prstGeom prst="rect">
-            <a:avLst/>
-          </a:prstGeom>
-          <a:solidFill>
-            <a:srgbClr val="15803D"/>
-          </a:solidFill>
-          <a:ln/>
-        </p:spPr>
-      </p:sp>
-      <p:sp>
-        <p:nvSpPr>
-          <p:cNvPr id="3" name="Text 1"/>
-          <p:cNvSpPr/>
-          <p:nvPr/>
-        </p:nvSpPr>
-        <p:spPr>
-          <a:xfrm>
-            <a:off x="713232" y="457200"/>
-            <a:ext cx="2496579" cy="329184"/>
-          </a:xfrm>
-          <a:prstGeom prst="rect">
-            <a:avLst/>
-          </a:prstGeom>
-          <a:noFill/>
-          <a:ln/>
-        </p:spPr>
-        <p:txBody>
-          <a:bodyPr wrap="none" lIns="0" tIns="0" rIns="0" bIns="0" rtlCol="0" anchor="ctr"/>
-          <a:lstStyle/>
-          <a:p>
-            <a:pPr indent="0" marL="0">
-              <a:buNone/>
-            </a:pPr>
-            <a:r>
-              <a:rPr lang="en-US" sz="1400" b="1" dirty="0">
-                <a:solidFill>
-                  <a:srgbClr val="FFFFFF"/>
-                </a:solidFill>
-                <a:latin typeface="Noto Sans JP" pitchFamily="34" charset="0"/>
-                <a:ea typeface="Noto Sans JP" pitchFamily="34" charset="-122"/>
-                <a:cs typeface="Noto Sans JP" pitchFamily="34" charset="-120"/>
-              </a:rPr>
-              <a:t>対等な要素の列挙(5件)</a:t>
-            </a:r>
-            <a:endParaRPr lang="en-US" sz="1400" dirty="0"/>
-          </a:p>
-        </p:txBody>
-      </p:sp>
-      <p:sp>
-        <p:nvSpPr>
-          <p:cNvPr id="4" name="Shape 2"/>
-          <p:cNvSpPr/>
-          <p:nvPr/>
-        </p:nvSpPr>
-        <p:spPr>
-          <a:xfrm>
-            <a:off x="548640" y="932688"/>
-            <a:ext cx="2499360" cy="1533906"/>
-          </a:xfrm>
-          <a:prstGeom prst="rect">
-            <a:avLst/>
-          </a:prstGeom>
-          <a:solidFill>
-            <a:srgbClr val="F3F3F3"/>
-          </a:solidFill>
-          <a:ln/>
-        </p:spPr>
-      </p:sp>
-      <p:sp>
-        <p:nvSpPr>
-          <p:cNvPr id="5" name="Text 3"/>
-          <p:cNvSpPr/>
-          <p:nvPr/>
-        </p:nvSpPr>
-        <p:spPr>
-          <a:xfrm>
-            <a:off x="731520" y="1042416"/>
-            <a:ext cx="2133600" cy="320040"/>
-          </a:xfrm>
-          <a:prstGeom prst="rect">
-            <a:avLst/>
-          </a:prstGeom>
-          <a:noFill/>
-          <a:ln/>
-        </p:spPr>
-        <p:txBody>
-          <a:bodyPr wrap="square" rtlCol="0" anchor="ctr"/>
-          <a:lstStyle/>
-          <a:p>
-            <a:pPr indent="0" marL="0">
-              <a:buNone/>
-            </a:pPr>
-            <a:r>
-              <a:rPr lang="en-US" sz="2400" b="1" dirty="0">
-                <a:solidFill>
-                  <a:srgbClr val="15803D">
-                    <a:alpha val="45000"/>
-                  </a:srgbClr>
-                </a:solidFill>
-                <a:latin typeface="Noto Sans JP" pitchFamily="34" charset="0"/>
-                <a:ea typeface="Noto Sans JP" pitchFamily="34" charset="-122"/>
-                <a:cs typeface="Noto Sans JP" pitchFamily="34" charset="-120"/>
-              </a:rPr>
-              <a:t>01</a:t>
-            </a:r>
-            <a:endParaRPr lang="en-US" sz="2400" dirty="0"/>
-          </a:p>
-        </p:txBody>
-      </p:sp>
-      <p:sp>
-        <p:nvSpPr>
-          <p:cNvPr id="6" name="Text 4"/>
-          <p:cNvSpPr/>
-          <p:nvPr/>
-        </p:nvSpPr>
-        <p:spPr>
-          <a:xfrm>
-            <a:off x="731520" y="1389888"/>
-            <a:ext cx="2133600" cy="365760"/>
-          </a:xfrm>
-          <a:prstGeom prst="rect">
-            <a:avLst/>
-          </a:prstGeom>
-          <a:noFill/>
-          <a:ln/>
-        </p:spPr>
-        <p:txBody>
-          <a:bodyPr wrap="square" rtlCol="0" anchor="ctr"/>
-          <a:lstStyle/>
-          <a:p>
-            <a:pPr indent="0" marL="0">
-              <a:buNone/>
-            </a:pPr>
-            <a:r>
-              <a:rPr lang="en-US" sz="1400" b="1" dirty="0">
-                <a:solidFill>
-                  <a:srgbClr val="434343"/>
-                </a:solidFill>
-                <a:latin typeface="Noto Sans JP" pitchFamily="34" charset="0"/>
-                <a:ea typeface="Noto Sans JP" pitchFamily="34" charset="-122"/>
-                <a:cs typeface="Noto Sans JP" pitchFamily="34" charset="-120"/>
-              </a:rPr>
-              <a:t>項目1</a:t>
-            </a:r>
-            <a:endParaRPr lang="en-US" sz="1400" dirty="0"/>
-          </a:p>
-        </p:txBody>
-      </p:sp>
-      <p:sp>
-        <p:nvSpPr>
-          <p:cNvPr id="7" name="Text 5"/>
-          <p:cNvSpPr/>
-          <p:nvPr/>
-        </p:nvSpPr>
-        <p:spPr>
-          <a:xfrm>
-            <a:off x="731520" y="1755648"/>
-            <a:ext cx="2133600" cy="573786"/>
-          </a:xfrm>
-          <a:prstGeom prst="rect">
-            <a:avLst/>
-          </a:prstGeom>
-          <a:noFill/>
-          <a:ln/>
-        </p:spPr>
-        <p:txBody>
-          <a:bodyPr wrap="square" rtlCol="0" anchor="t"/>
-          <a:lstStyle/>
-          <a:p>
-            <a:pPr indent="0" marL="0">
-              <a:buNone/>
-            </a:pPr>
-            <a:r>
-              <a:rPr lang="en-US" sz="1200" dirty="0">
-                <a:solidFill>
-                  <a:srgbClr val="595959"/>
-                </a:solidFill>
-                <a:latin typeface="Noto Sans JP" pitchFamily="34" charset="0"/>
-                <a:ea typeface="Noto Sans JP" pitchFamily="34" charset="-122"/>
-                <a:cs typeface="Noto Sans JP" pitchFamily="34" charset="-120"/>
-              </a:rPr>
-              <a:t>説明1</a:t>
-            </a:r>
-            <a:endParaRPr lang="en-US" sz="1200" dirty="0"/>
-          </a:p>
-        </p:txBody>
-      </p:sp>
-      <p:sp>
-        <p:nvSpPr>
-          <p:cNvPr id="8" name="Shape 6"/>
-          <p:cNvSpPr/>
-          <p:nvPr/>
-        </p:nvSpPr>
-        <p:spPr>
-          <a:xfrm>
-            <a:off x="3322320" y="932688"/>
-            <a:ext cx="2499360" cy="1533906"/>
-          </a:xfrm>
-          <a:prstGeom prst="rect">
-            <a:avLst/>
-          </a:prstGeom>
-          <a:solidFill>
-            <a:srgbClr val="F3F3F3"/>
-          </a:solidFill>
-          <a:ln/>
-        </p:spPr>
-      </p:sp>
-      <p:sp>
-        <p:nvSpPr>
-          <p:cNvPr id="9" name="Text 7"/>
-          <p:cNvSpPr/>
-          <p:nvPr/>
-        </p:nvSpPr>
-        <p:spPr>
-          <a:xfrm>
-            <a:off x="3505200" y="1042416"/>
-            <a:ext cx="2133600" cy="320040"/>
-          </a:xfrm>
-          <a:prstGeom prst="rect">
-            <a:avLst/>
-          </a:prstGeom>
-          <a:noFill/>
-          <a:ln/>
-        </p:spPr>
-        <p:txBody>
-          <a:bodyPr wrap="square" rtlCol="0" anchor="ctr"/>
-          <a:lstStyle/>
-          <a:p>
-            <a:pPr indent="0" marL="0">
-              <a:buNone/>
-            </a:pPr>
-            <a:r>
-              <a:rPr lang="en-US" sz="2400" b="1" dirty="0">
-                <a:solidFill>
-                  <a:srgbClr val="15803D">
-                    <a:alpha val="45000"/>
-                  </a:srgbClr>
-                </a:solidFill>
-                <a:latin typeface="Noto Sans JP" pitchFamily="34" charset="0"/>
-                <a:ea typeface="Noto Sans JP" pitchFamily="34" charset="-122"/>
-                <a:cs typeface="Noto Sans JP" pitchFamily="34" charset="-120"/>
-              </a:rPr>
-              <a:t>02</a:t>
-            </a:r>
-            <a:endParaRPr lang="en-US" sz="2400" dirty="0"/>
-          </a:p>
-        </p:txBody>
-      </p:sp>
-      <p:sp>
-        <p:nvSpPr>
-          <p:cNvPr id="10" name="Text 8"/>
-          <p:cNvSpPr/>
-          <p:nvPr/>
-        </p:nvSpPr>
-        <p:spPr>
-          <a:xfrm>
-            <a:off x="3505200" y="1389888"/>
-            <a:ext cx="2133600" cy="365760"/>
-          </a:xfrm>
-          <a:prstGeom prst="rect">
-            <a:avLst/>
-          </a:prstGeom>
-          <a:noFill/>
-          <a:ln/>
-        </p:spPr>
-        <p:txBody>
-          <a:bodyPr wrap="square" rtlCol="0" anchor="ctr"/>
-          <a:lstStyle/>
-          <a:p>
-            <a:pPr indent="0" marL="0">
-              <a:buNone/>
-            </a:pPr>
-            <a:r>
-              <a:rPr lang="en-US" sz="1400" b="1" dirty="0">
-                <a:solidFill>
-                  <a:srgbClr val="434343"/>
-                </a:solidFill>
-                <a:latin typeface="Noto Sans JP" pitchFamily="34" charset="0"/>
-                <a:ea typeface="Noto Sans JP" pitchFamily="34" charset="-122"/>
-                <a:cs typeface="Noto Sans JP" pitchFamily="34" charset="-120"/>
-              </a:rPr>
-              <a:t>項目2</a:t>
-            </a:r>
-            <a:endParaRPr lang="en-US" sz="1400" dirty="0"/>
-          </a:p>
-        </p:txBody>
-      </p:sp>
-      <p:sp>
-        <p:nvSpPr>
-          <p:cNvPr id="11" name="Text 9"/>
-          <p:cNvSpPr/>
-          <p:nvPr/>
-        </p:nvSpPr>
-        <p:spPr>
-          <a:xfrm>
-            <a:off x="3505200" y="1755648"/>
-            <a:ext cx="2133600" cy="573786"/>
-          </a:xfrm>
-          <a:prstGeom prst="rect">
-            <a:avLst/>
-          </a:prstGeom>
-          <a:noFill/>
-          <a:ln/>
-        </p:spPr>
-        <p:txBody>
-          <a:bodyPr wrap="square" rtlCol="0" anchor="t"/>
-          <a:lstStyle/>
-          <a:p>
-            <a:pPr indent="0" marL="0">
-              <a:buNone/>
-            </a:pPr>
-            <a:r>
-              <a:rPr lang="en-US" sz="1200" dirty="0">
-                <a:solidFill>
-                  <a:srgbClr val="595959"/>
-                </a:solidFill>
-                <a:latin typeface="Noto Sans JP" pitchFamily="34" charset="0"/>
-                <a:ea typeface="Noto Sans JP" pitchFamily="34" charset="-122"/>
-                <a:cs typeface="Noto Sans JP" pitchFamily="34" charset="-120"/>
-              </a:rPr>
-              <a:t>説明2</a:t>
-            </a:r>
-            <a:endParaRPr lang="en-US" sz="1200" dirty="0"/>
-          </a:p>
-        </p:txBody>
-      </p:sp>
-      <p:sp>
-        <p:nvSpPr>
-          <p:cNvPr id="12" name="Shape 10"/>
-          <p:cNvSpPr/>
-          <p:nvPr/>
-        </p:nvSpPr>
-        <p:spPr>
-          <a:xfrm>
-            <a:off x="6096000" y="932688"/>
-            <a:ext cx="2499360" cy="1533906"/>
-          </a:xfrm>
-          <a:prstGeom prst="rect">
-            <a:avLst/>
-          </a:prstGeom>
-          <a:solidFill>
-            <a:srgbClr val="F3F3F3"/>
-          </a:solidFill>
-          <a:ln/>
-        </p:spPr>
-      </p:sp>
-      <p:sp>
-        <p:nvSpPr>
-          <p:cNvPr id="13" name="Text 11"/>
-          <p:cNvSpPr/>
-          <p:nvPr/>
-        </p:nvSpPr>
-        <p:spPr>
-          <a:xfrm>
-            <a:off x="6278880" y="1042416"/>
-            <a:ext cx="2133600" cy="320040"/>
-          </a:xfrm>
-          <a:prstGeom prst="rect">
-            <a:avLst/>
-          </a:prstGeom>
-          <a:noFill/>
-          <a:ln/>
-        </p:spPr>
-        <p:txBody>
-          <a:bodyPr wrap="square" rtlCol="0" anchor="ctr"/>
-          <a:lstStyle/>
-          <a:p>
-            <a:pPr indent="0" marL="0">
-              <a:buNone/>
-            </a:pPr>
-            <a:r>
-              <a:rPr lang="en-US" sz="2400" b="1" dirty="0">
-                <a:solidFill>
-                  <a:srgbClr val="15803D">
-                    <a:alpha val="45000"/>
-                  </a:srgbClr>
-                </a:solidFill>
-                <a:latin typeface="Noto Sans JP" pitchFamily="34" charset="0"/>
-                <a:ea typeface="Noto Sans JP" pitchFamily="34" charset="-122"/>
-                <a:cs typeface="Noto Sans JP" pitchFamily="34" charset="-120"/>
-              </a:rPr>
-              <a:t>03</a:t>
-            </a:r>
-            <a:endParaRPr lang="en-US" sz="2400" dirty="0"/>
-          </a:p>
-        </p:txBody>
-      </p:sp>
-      <p:sp>
-        <p:nvSpPr>
-          <p:cNvPr id="14" name="Text 12"/>
-          <p:cNvSpPr/>
-          <p:nvPr/>
-        </p:nvSpPr>
-        <p:spPr>
-          <a:xfrm>
-            <a:off x="6278880" y="1389888"/>
-            <a:ext cx="2133600" cy="365760"/>
-          </a:xfrm>
-          <a:prstGeom prst="rect">
-            <a:avLst/>
-          </a:prstGeom>
-          <a:noFill/>
-          <a:ln/>
-        </p:spPr>
-        <p:txBody>
-          <a:bodyPr wrap="square" rtlCol="0" anchor="ctr"/>
-          <a:lstStyle/>
-          <a:p>
-            <a:pPr indent="0" marL="0">
-              <a:buNone/>
-            </a:pPr>
-            <a:r>
-              <a:rPr lang="en-US" sz="1400" b="1" dirty="0">
-                <a:solidFill>
-                  <a:srgbClr val="434343"/>
-                </a:solidFill>
-                <a:latin typeface="Noto Sans JP" pitchFamily="34" charset="0"/>
-                <a:ea typeface="Noto Sans JP" pitchFamily="34" charset="-122"/>
-                <a:cs typeface="Noto Sans JP" pitchFamily="34" charset="-120"/>
-              </a:rPr>
-              <a:t>項目3</a:t>
-            </a:r>
-            <a:endParaRPr lang="en-US" sz="1400" dirty="0"/>
-          </a:p>
-        </p:txBody>
-      </p:sp>
-      <p:sp>
-        <p:nvSpPr>
-          <p:cNvPr id="15" name="Text 13"/>
-          <p:cNvSpPr/>
-          <p:nvPr/>
-        </p:nvSpPr>
-        <p:spPr>
-          <a:xfrm>
-            <a:off x="6278880" y="1755648"/>
-            <a:ext cx="2133600" cy="573786"/>
-          </a:xfrm>
-          <a:prstGeom prst="rect">
-            <a:avLst/>
-          </a:prstGeom>
-          <a:noFill/>
-          <a:ln/>
-        </p:spPr>
-        <p:txBody>
-          <a:bodyPr wrap="square" rtlCol="0" anchor="t"/>
-          <a:lstStyle/>
-          <a:p>
-            <a:pPr indent="0" marL="0">
-              <a:buNone/>
-            </a:pPr>
-            <a:r>
-              <a:rPr lang="en-US" sz="1200" dirty="0">
-                <a:solidFill>
-                  <a:srgbClr val="595959"/>
-                </a:solidFill>
-                <a:latin typeface="Noto Sans JP" pitchFamily="34" charset="0"/>
-                <a:ea typeface="Noto Sans JP" pitchFamily="34" charset="-122"/>
-                <a:cs typeface="Noto Sans JP" pitchFamily="34" charset="-120"/>
-              </a:rPr>
-              <a:t>説明3</a:t>
-            </a:r>
-            <a:endParaRPr lang="en-US" sz="1200" dirty="0"/>
-          </a:p>
-        </p:txBody>
-      </p:sp>
-      <p:sp>
-        <p:nvSpPr>
-          <p:cNvPr id="16" name="Shape 14"/>
-          <p:cNvSpPr/>
-          <p:nvPr/>
-        </p:nvSpPr>
-        <p:spPr>
-          <a:xfrm>
-            <a:off x="1935480" y="2740914"/>
-            <a:ext cx="2499360" cy="1533906"/>
-          </a:xfrm>
-          <a:prstGeom prst="rect">
-            <a:avLst/>
-          </a:prstGeom>
-          <a:solidFill>
-            <a:srgbClr val="F3F3F3"/>
-          </a:solidFill>
-          <a:ln/>
-        </p:spPr>
-      </p:sp>
-      <p:sp>
-        <p:nvSpPr>
-          <p:cNvPr id="17" name="Text 15"/>
-          <p:cNvSpPr/>
-          <p:nvPr/>
-        </p:nvSpPr>
-        <p:spPr>
-          <a:xfrm>
-            <a:off x="2118360" y="2850642"/>
-            <a:ext cx="2133600" cy="320040"/>
-          </a:xfrm>
-          <a:prstGeom prst="rect">
-            <a:avLst/>
-          </a:prstGeom>
-          <a:noFill/>
-          <a:ln/>
-        </p:spPr>
-        <p:txBody>
-          <a:bodyPr wrap="square" rtlCol="0" anchor="ctr"/>
-          <a:lstStyle/>
-          <a:p>
-            <a:pPr indent="0" marL="0">
-              <a:buNone/>
-            </a:pPr>
-            <a:r>
-              <a:rPr lang="en-US" sz="2400" b="1" dirty="0">
-                <a:solidFill>
-                  <a:srgbClr val="15803D">
-                    <a:alpha val="45000"/>
-                  </a:srgbClr>
-                </a:solidFill>
-                <a:latin typeface="Noto Sans JP" pitchFamily="34" charset="0"/>
-                <a:ea typeface="Noto Sans JP" pitchFamily="34" charset="-122"/>
-                <a:cs typeface="Noto Sans JP" pitchFamily="34" charset="-120"/>
-              </a:rPr>
-              <a:t>04</a:t>
-            </a:r>
-            <a:endParaRPr lang="en-US" sz="2400" dirty="0"/>
-          </a:p>
-        </p:txBody>
-      </p:sp>
-      <p:sp>
-        <p:nvSpPr>
-          <p:cNvPr id="18" name="Text 16"/>
-          <p:cNvSpPr/>
-          <p:nvPr/>
-        </p:nvSpPr>
-        <p:spPr>
-          <a:xfrm>
-            <a:off x="2118360" y="3198114"/>
-            <a:ext cx="2133600" cy="365760"/>
-          </a:xfrm>
-          <a:prstGeom prst="rect">
-            <a:avLst/>
-          </a:prstGeom>
-          <a:noFill/>
-          <a:ln/>
-        </p:spPr>
-        <p:txBody>
-          <a:bodyPr wrap="square" rtlCol="0" anchor="ctr"/>
-          <a:lstStyle/>
-          <a:p>
-            <a:pPr indent="0" marL="0">
-              <a:buNone/>
-            </a:pPr>
-            <a:r>
-              <a:rPr lang="en-US" sz="1400" b="1" dirty="0">
-                <a:solidFill>
-                  <a:srgbClr val="434343"/>
-                </a:solidFill>
-                <a:latin typeface="Noto Sans JP" pitchFamily="34" charset="0"/>
-                <a:ea typeface="Noto Sans JP" pitchFamily="34" charset="-122"/>
-                <a:cs typeface="Noto Sans JP" pitchFamily="34" charset="-120"/>
-              </a:rPr>
-              <a:t>項目4</a:t>
-            </a:r>
-            <a:endParaRPr lang="en-US" sz="1400" dirty="0"/>
-          </a:p>
-        </p:txBody>
-      </p:sp>
-      <p:sp>
-        <p:nvSpPr>
-          <p:cNvPr id="19" name="Text 17"/>
-          <p:cNvSpPr/>
-          <p:nvPr/>
-        </p:nvSpPr>
-        <p:spPr>
-          <a:xfrm>
-            <a:off x="2118360" y="3563874"/>
-            <a:ext cx="2133600" cy="573786"/>
-          </a:xfrm>
-          <a:prstGeom prst="rect">
-            <a:avLst/>
-          </a:prstGeom>
-          <a:noFill/>
-          <a:ln/>
-        </p:spPr>
-        <p:txBody>
-          <a:bodyPr wrap="square" rtlCol="0" anchor="t"/>
-          <a:lstStyle/>
-          <a:p>
-            <a:pPr indent="0" marL="0">
-              <a:buNone/>
-            </a:pPr>
-            <a:r>
-              <a:rPr lang="en-US" sz="1200" dirty="0">
-                <a:solidFill>
-                  <a:srgbClr val="595959"/>
-                </a:solidFill>
-                <a:latin typeface="Noto Sans JP" pitchFamily="34" charset="0"/>
-                <a:ea typeface="Noto Sans JP" pitchFamily="34" charset="-122"/>
-                <a:cs typeface="Noto Sans JP" pitchFamily="34" charset="-120"/>
-              </a:rPr>
-              <a:t>説明4</a:t>
-            </a:r>
-            <a:endParaRPr lang="en-US" sz="1200" dirty="0"/>
-          </a:p>
-        </p:txBody>
-      </p:sp>
-      <p:sp>
-        <p:nvSpPr>
-          <p:cNvPr id="20" name="Shape 18"/>
-          <p:cNvSpPr/>
-          <p:nvPr/>
-        </p:nvSpPr>
-        <p:spPr>
-          <a:xfrm>
-            <a:off x="4709160" y="2740914"/>
-            <a:ext cx="2499360" cy="1533906"/>
-          </a:xfrm>
-          <a:prstGeom prst="rect">
-            <a:avLst/>
-          </a:prstGeom>
-          <a:solidFill>
-            <a:srgbClr val="F3F3F3"/>
-          </a:solidFill>
-          <a:ln/>
-        </p:spPr>
-      </p:sp>
-      <p:sp>
-        <p:nvSpPr>
-          <p:cNvPr id="21" name="Text 19"/>
-          <p:cNvSpPr/>
-          <p:nvPr/>
-        </p:nvSpPr>
-        <p:spPr>
-          <a:xfrm>
-            <a:off x="4892040" y="2850642"/>
-            <a:ext cx="2133600" cy="320040"/>
-          </a:xfrm>
-          <a:prstGeom prst="rect">
-            <a:avLst/>
-          </a:prstGeom>
-          <a:noFill/>
-          <a:ln/>
-        </p:spPr>
-        <p:txBody>
-          <a:bodyPr wrap="square" rtlCol="0" anchor="ctr"/>
-          <a:lstStyle/>
-          <a:p>
-            <a:pPr indent="0" marL="0">
-              <a:buNone/>
-            </a:pPr>
-            <a:r>
-              <a:rPr lang="en-US" sz="2400" b="1" dirty="0">
-                <a:solidFill>
-                  <a:srgbClr val="15803D">
-                    <a:alpha val="45000"/>
-                  </a:srgbClr>
-                </a:solidFill>
-                <a:latin typeface="Noto Sans JP" pitchFamily="34" charset="0"/>
-                <a:ea typeface="Noto Sans JP" pitchFamily="34" charset="-122"/>
-                <a:cs typeface="Noto Sans JP" pitchFamily="34" charset="-120"/>
-              </a:rPr>
-              <a:t>05</a:t>
-            </a:r>
-            <a:endParaRPr lang="en-US" sz="2400" dirty="0"/>
-          </a:p>
-        </p:txBody>
-      </p:sp>
-      <p:sp>
-        <p:nvSpPr>
-          <p:cNvPr id="22" name="Text 20"/>
-          <p:cNvSpPr/>
-          <p:nvPr/>
-        </p:nvSpPr>
-        <p:spPr>
-          <a:xfrm>
-            <a:off x="4892040" y="3198114"/>
-            <a:ext cx="2133600" cy="365760"/>
-          </a:xfrm>
-          <a:prstGeom prst="rect">
-            <a:avLst/>
-          </a:prstGeom>
-          <a:noFill/>
-          <a:ln/>
-        </p:spPr>
-        <p:txBody>
-          <a:bodyPr wrap="square" rtlCol="0" anchor="ctr"/>
-          <a:lstStyle/>
-          <a:p>
-            <a:pPr indent="0" marL="0">
-              <a:buNone/>
-            </a:pPr>
-            <a:r>
-              <a:rPr lang="en-US" sz="1400" b="1" dirty="0">
-                <a:solidFill>
-                  <a:srgbClr val="434343"/>
-                </a:solidFill>
-                <a:latin typeface="Noto Sans JP" pitchFamily="34" charset="0"/>
-                <a:ea typeface="Noto Sans JP" pitchFamily="34" charset="-122"/>
-                <a:cs typeface="Noto Sans JP" pitchFamily="34" charset="-120"/>
-              </a:rPr>
-              <a:t>項目5</a:t>
-            </a:r>
-            <a:endParaRPr lang="en-US" sz="1400" dirty="0"/>
-          </a:p>
-        </p:txBody>
-      </p:sp>
-      <p:sp>
-        <p:nvSpPr>
-          <p:cNvPr id="23" name="Text 21"/>
-          <p:cNvSpPr/>
-          <p:nvPr/>
-        </p:nvSpPr>
-        <p:spPr>
-          <a:xfrm>
-            <a:off x="4892040" y="3563874"/>
-            <a:ext cx="2133600" cy="573786"/>
-          </a:xfrm>
-          <a:prstGeom prst="rect">
-            <a:avLst/>
-          </a:prstGeom>
-          <a:noFill/>
-          <a:ln/>
-        </p:spPr>
-        <p:txBody>
-          <a:bodyPr wrap="square" rtlCol="0" anchor="t"/>
-          <a:lstStyle/>
-          <a:p>
-            <a:pPr indent="0" marL="0">
-              <a:buNone/>
-            </a:pPr>
-            <a:r>
-              <a:rPr lang="en-US" sz="1200" dirty="0">
-                <a:solidFill>
-                  <a:srgbClr val="595959"/>
-                </a:solidFill>
-                <a:latin typeface="Noto Sans JP" pitchFamily="34" charset="0"/>
-                <a:ea typeface="Noto Sans JP" pitchFamily="34" charset="-122"/>
-                <a:cs typeface="Noto Sans JP" pitchFamily="34" charset="-120"/>
-              </a:rPr>
-              <a:t>説明5</a:t>
-            </a:r>
-            <a:endParaRPr lang="en-US" sz="1200" dirty="0"/>
-          </a:p>
-        </p:txBody>
-      </p:sp>
-      <p:sp>
-        <p:nvSpPr>
-          <p:cNvPr id="24" name="Text 22"/>
-          <p:cNvSpPr/>
-          <p:nvPr/>
-        </p:nvSpPr>
-        <p:spPr>
-          <a:xfrm>
-            <a:off x="8046720" y="4411980"/>
-            <a:ext cx="548640" cy="274320"/>
-          </a:xfrm>
-          <a:prstGeom prst="rect">
-            <a:avLst/>
-          </a:prstGeom>
-          <a:noFill/>
-          <a:ln/>
-        </p:spPr>
-        <p:txBody>
-          <a:bodyPr wrap="square" rtlCol="0" anchor="ctr"/>
-          <a:lstStyle/>
-          <a:p>
-            <a:pPr algn="r" indent="0" marL="0">
-              <a:buNone/>
-            </a:pPr>
-            <a:r>
-              <a:rPr lang="en-US" sz="1200" dirty="0">
-                <a:solidFill>
-                  <a:srgbClr val="595959"/>
-                </a:solidFill>
-                <a:latin typeface="Noto Sans JP" pitchFamily="34" charset="0"/>
-                <a:ea typeface="Noto Sans JP" pitchFamily="34" charset="-122"/>
-                <a:cs typeface="Noto Sans JP" pitchFamily="34" charset="-120"/>
-              </a:rPr>
-              <a:t>05</a:t>
-            </a:r>
-            <a:endParaRPr lang="en-US" sz="1200" dirty="0"/>
-          </a:p>
-        </p:txBody>
-      </p:sp>
-    </p:spTree>
-  </p:cSld>
-  <p:clrMapOvr>
-    <a:masterClrMapping/>
-  </p:clrMapOvr>
-</p:sld>
-</file>
-
-<file path=ppt/slides/slide6.xml><?xml version="1.0" encoding="utf-8"?>
-<p:sld xmlns:a="http://schemas.openxmlformats.org/drawingml/2006/main" xmlns:r="http://schemas.openxmlformats.org/officeDocument/2006/relationships" xmlns:p="http://schemas.openxmlformats.org/presentationml/2006/main">
-  <p:cSld name="Slide 6">
-    <p:bg>
-      <p:bgPr>
-        <a:solidFill>
-          <a:srgbClr val="FFFFFF"/>
-        </a:solidFill>
-      </p:bgPr>
-    </p:bg>
-    <p:spTree>
-      <p:nvGrpSpPr>
-        <p:cNvPr id="1" name=""/>
-        <p:cNvGrpSpPr/>
-        <p:nvPr/>
-      </p:nvGrpSpPr>
-      <p:grpSpPr>
-        <a:xfrm>
-          <a:off x="0" y="0"/>
-          <a:ext cx="0" cy="0"/>
-          <a:chOff x="0" y="0"/>
-          <a:chExt cx="0" cy="0"/>
-        </a:xfrm>
-      </p:grpSpPr>
-      <p:sp>
-        <p:nvSpPr>
-          <p:cNvPr id="2" name="Shape 0"/>
-          <p:cNvSpPr/>
-          <p:nvPr/>
-        </p:nvSpPr>
-        <p:spPr>
-          <a:xfrm>
-            <a:off x="548640" y="457200"/>
-            <a:ext cx="1504887" cy="329184"/>
-          </a:xfrm>
-          <a:prstGeom prst="rect">
-            <a:avLst/>
-          </a:prstGeom>
-          <a:solidFill>
-            <a:srgbClr val="15803D"/>
-          </a:solidFill>
-          <a:ln/>
-        </p:spPr>
-      </p:sp>
-      <p:sp>
-        <p:nvSpPr>
-          <p:cNvPr id="3" name="Text 1"/>
-          <p:cNvSpPr/>
-          <p:nvPr/>
-        </p:nvSpPr>
-        <p:spPr>
-          <a:xfrm>
-            <a:off x="713232" y="457200"/>
-            <a:ext cx="1175703" cy="329184"/>
-          </a:xfrm>
-          <a:prstGeom prst="rect">
-            <a:avLst/>
-          </a:prstGeom>
-          <a:noFill/>
-          <a:ln/>
-        </p:spPr>
-        <p:txBody>
-          <a:bodyPr wrap="none" lIns="0" tIns="0" rIns="0" bIns="0" rtlCol="0" anchor="ctr"/>
-          <a:lstStyle/>
-          <a:p>
-            <a:pPr indent="0" marL="0">
-              <a:buNone/>
-            </a:pPr>
-            <a:r>
-              <a:rPr lang="en-US" sz="1400" b="1" dirty="0">
-                <a:solidFill>
-                  <a:srgbClr val="FFFFFF"/>
-                </a:solidFill>
-                <a:latin typeface="Noto Sans JP" pitchFamily="34" charset="0"/>
-                <a:ea typeface="Noto Sans JP" pitchFamily="34" charset="-122"/>
-                <a:cs typeface="Noto Sans JP" pitchFamily="34" charset="-120"/>
-              </a:rPr>
-              <a:t>指標の強調</a:t>
-            </a:r>
-            <a:endParaRPr lang="en-US" sz="1400" dirty="0"/>
-          </a:p>
-        </p:txBody>
-      </p:sp>
-      <p:sp>
-        <p:nvSpPr>
-          <p:cNvPr id="4" name="Shape 2"/>
-          <p:cNvSpPr/>
-          <p:nvPr/>
-        </p:nvSpPr>
-        <p:spPr>
-          <a:xfrm>
-            <a:off x="548640" y="932688"/>
-            <a:ext cx="3264408" cy="3342132"/>
-          </a:xfrm>
-          <a:prstGeom prst="rect">
-            <a:avLst/>
-          </a:prstGeom>
-          <a:solidFill>
-            <a:srgbClr val="15803D"/>
-          </a:solidFill>
-          <a:ln/>
-        </p:spPr>
-      </p:sp>
-      <p:sp>
-        <p:nvSpPr>
-          <p:cNvPr id="5" name="Text 3"/>
-          <p:cNvSpPr/>
-          <p:nvPr/>
-        </p:nvSpPr>
-        <p:spPr>
-          <a:xfrm>
-            <a:off x="822960" y="1207008"/>
-            <a:ext cx="2715768" cy="1838173"/>
-          </a:xfrm>
-          <a:prstGeom prst="rect">
-            <a:avLst/>
-          </a:prstGeom>
-          <a:noFill/>
-          <a:ln/>
-        </p:spPr>
-        <p:txBody>
-          <a:bodyPr wrap="square" rtlCol="0" anchor="b"/>
-          <a:lstStyle/>
-          <a:p>
-            <a:pPr indent="0" marL="0">
-              <a:buNone/>
-            </a:pPr>
-            <a:r>
-              <a:rPr lang="en-US" sz="4000" b="1" dirty="0">
-                <a:solidFill>
-                  <a:srgbClr val="FFFFFF"/>
-                </a:solidFill>
-                <a:latin typeface="Noto Sans JP" pitchFamily="34" charset="0"/>
-                <a:ea typeface="Noto Sans JP" pitchFamily="34" charset="-122"/>
-                <a:cs typeface="Noto Sans JP" pitchFamily="34" charset="-120"/>
-              </a:rPr>
-              <a:t>120%</a:t>
-            </a:r>
-            <a:endParaRPr lang="en-US" sz="4000" dirty="0"/>
-          </a:p>
-        </p:txBody>
-      </p:sp>
-      <p:sp>
-        <p:nvSpPr>
-          <p:cNvPr id="6" name="Text 4"/>
-          <p:cNvSpPr/>
-          <p:nvPr/>
-        </p:nvSpPr>
-        <p:spPr>
-          <a:xfrm>
-            <a:off x="822960" y="2908021"/>
-            <a:ext cx="2715768" cy="365760"/>
-          </a:xfrm>
-          <a:prstGeom prst="rect">
-            <a:avLst/>
-          </a:prstGeom>
-          <a:noFill/>
-          <a:ln/>
-        </p:spPr>
-        <p:txBody>
-          <a:bodyPr wrap="square" rtlCol="0" anchor="ctr"/>
-          <a:lstStyle/>
-          <a:p>
-            <a:pPr indent="0" marL="0">
-              <a:buNone/>
-            </a:pPr>
-            <a:r>
-              <a:rPr lang="en-US" sz="1400" dirty="0">
-                <a:solidFill>
-                  <a:srgbClr val="FFFFFF"/>
-                </a:solidFill>
-                <a:latin typeface="Noto Sans JP" pitchFamily="34" charset="0"/>
-                <a:ea typeface="Noto Sans JP" pitchFamily="34" charset="-122"/>
-                <a:cs typeface="Noto Sans JP" pitchFamily="34" charset="-120"/>
-              </a:rPr>
-              <a:t>主要指標 ▲</a:t>
-            </a:r>
-            <a:endParaRPr lang="en-US" sz="1400" dirty="0"/>
-          </a:p>
-        </p:txBody>
-      </p:sp>
-      <p:sp>
-        <p:nvSpPr>
-          <p:cNvPr id="7" name="Shape 5"/>
-          <p:cNvSpPr/>
-          <p:nvPr/>
-        </p:nvSpPr>
-        <p:spPr>
-          <a:xfrm>
-            <a:off x="4087368" y="932688"/>
-            <a:ext cx="4507992" cy="1533906"/>
-          </a:xfrm>
-          <a:prstGeom prst="rect">
-            <a:avLst/>
-          </a:prstGeom>
-          <a:solidFill>
-            <a:srgbClr val="F3F3F3"/>
-          </a:solidFill>
-          <a:ln/>
-        </p:spPr>
-      </p:sp>
-      <p:sp>
-        <p:nvSpPr>
-          <p:cNvPr id="8" name="Text 6"/>
-          <p:cNvSpPr/>
-          <p:nvPr/>
-        </p:nvSpPr>
-        <p:spPr>
-          <a:xfrm>
-            <a:off x="4315968" y="1024128"/>
-            <a:ext cx="4050792" cy="843648"/>
-          </a:xfrm>
-          <a:prstGeom prst="rect">
-            <a:avLst/>
-          </a:prstGeom>
-          <a:noFill/>
-          <a:ln/>
-        </p:spPr>
-        <p:txBody>
-          <a:bodyPr wrap="square" rtlCol="0" anchor="b"/>
-          <a:lstStyle/>
-          <a:p>
-            <a:pPr indent="0" marL="0">
-              <a:buNone/>
-            </a:pPr>
-            <a:r>
-              <a:rPr lang="en-US" sz="2800" b="1" dirty="0">
-                <a:solidFill>
-                  <a:srgbClr val="15803D"/>
-                </a:solidFill>
-                <a:latin typeface="Noto Sans JP" pitchFamily="34" charset="0"/>
-                <a:ea typeface="Noto Sans JP" pitchFamily="34" charset="-122"/>
-                <a:cs typeface="Noto Sans JP" pitchFamily="34" charset="-120"/>
-              </a:rPr>
-              <a:t>45件</a:t>
-            </a:r>
-            <a:endParaRPr lang="en-US" sz="2800" dirty="0"/>
-          </a:p>
-        </p:txBody>
-      </p:sp>
-      <p:sp>
-        <p:nvSpPr>
-          <p:cNvPr id="9" name="Text 7"/>
-          <p:cNvSpPr/>
-          <p:nvPr/>
-        </p:nvSpPr>
-        <p:spPr>
-          <a:xfrm>
-            <a:off x="4315968" y="1853032"/>
-            <a:ext cx="4050792" cy="536867"/>
-          </a:xfrm>
-          <a:prstGeom prst="rect">
-            <a:avLst/>
-          </a:prstGeom>
-          <a:noFill/>
-          <a:ln/>
-        </p:spPr>
-        <p:txBody>
-          <a:bodyPr wrap="square" rtlCol="0" anchor="ctr"/>
-          <a:lstStyle/>
-          <a:p>
-            <a:pPr indent="0" marL="0">
-              <a:buNone/>
-            </a:pPr>
-            <a:r>
-              <a:rPr lang="en-US" sz="1200" dirty="0">
-                <a:solidFill>
-                  <a:srgbClr val="595959"/>
-                </a:solidFill>
-                <a:latin typeface="Noto Sans JP" pitchFamily="34" charset="0"/>
-                <a:ea typeface="Noto Sans JP" pitchFamily="34" charset="-122"/>
-                <a:cs typeface="Noto Sans JP" pitchFamily="34" charset="-120"/>
-              </a:rPr>
-              <a:t>指標2</a:t>
-            </a:r>
-            <a:endParaRPr lang="en-US" sz="1200" dirty="0"/>
-          </a:p>
-        </p:txBody>
-      </p:sp>
-      <p:sp>
-        <p:nvSpPr>
-          <p:cNvPr id="10" name="Shape 8"/>
-          <p:cNvSpPr/>
-          <p:nvPr/>
-        </p:nvSpPr>
-        <p:spPr>
-          <a:xfrm>
-            <a:off x="4087368" y="2740914"/>
-            <a:ext cx="4507992" cy="1533906"/>
-          </a:xfrm>
-          <a:prstGeom prst="rect">
-            <a:avLst/>
-          </a:prstGeom>
-          <a:solidFill>
-            <a:srgbClr val="F3F3F3"/>
-          </a:solidFill>
-          <a:ln/>
-        </p:spPr>
-      </p:sp>
-      <p:sp>
-        <p:nvSpPr>
-          <p:cNvPr id="11" name="Text 9"/>
-          <p:cNvSpPr/>
-          <p:nvPr/>
-        </p:nvSpPr>
-        <p:spPr>
-          <a:xfrm>
-            <a:off x="4315968" y="2832354"/>
-            <a:ext cx="4050792" cy="843648"/>
-          </a:xfrm>
-          <a:prstGeom prst="rect">
-            <a:avLst/>
-          </a:prstGeom>
-          <a:noFill/>
-          <a:ln/>
-        </p:spPr>
-        <p:txBody>
-          <a:bodyPr wrap="square" rtlCol="0" anchor="b"/>
-          <a:lstStyle/>
-          <a:p>
-            <a:pPr indent="0" marL="0">
-              <a:buNone/>
-            </a:pPr>
-            <a:r>
-              <a:rPr lang="en-US" sz="2800" b="1" dirty="0">
-                <a:solidFill>
-                  <a:srgbClr val="15803D"/>
-                </a:solidFill>
-                <a:latin typeface="Noto Sans JP" pitchFamily="34" charset="0"/>
-                <a:ea typeface="Noto Sans JP" pitchFamily="34" charset="-122"/>
-                <a:cs typeface="Noto Sans JP" pitchFamily="34" charset="-120"/>
-              </a:rPr>
-              <a:t>8.2</a:t>
-            </a:r>
-            <a:endParaRPr lang="en-US" sz="2800" dirty="0"/>
-          </a:p>
-        </p:txBody>
-      </p:sp>
-      <p:sp>
-        <p:nvSpPr>
-          <p:cNvPr id="12" name="Text 10"/>
-          <p:cNvSpPr/>
-          <p:nvPr/>
-        </p:nvSpPr>
-        <p:spPr>
-          <a:xfrm>
-            <a:off x="4315968" y="3661258"/>
-            <a:ext cx="4050792" cy="536867"/>
-          </a:xfrm>
-          <a:prstGeom prst="rect">
-            <a:avLst/>
-          </a:prstGeom>
-          <a:noFill/>
-          <a:ln/>
-        </p:spPr>
-        <p:txBody>
-          <a:bodyPr wrap="square" rtlCol="0" anchor="ctr"/>
-          <a:lstStyle/>
-          <a:p>
-            <a:pPr indent="0" marL="0">
-              <a:buNone/>
-            </a:pPr>
-            <a:r>
-              <a:rPr lang="en-US" sz="1200" dirty="0">
-                <a:solidFill>
-                  <a:srgbClr val="595959"/>
-                </a:solidFill>
-                <a:latin typeface="Noto Sans JP" pitchFamily="34" charset="0"/>
-                <a:ea typeface="Noto Sans JP" pitchFamily="34" charset="-122"/>
-                <a:cs typeface="Noto Sans JP" pitchFamily="34" charset="-120"/>
-              </a:rPr>
-              <a:t>指標3 →</a:t>
-            </a:r>
-            <a:endParaRPr lang="en-US" sz="1200" dirty="0"/>
-          </a:p>
-        </p:txBody>
-      </p:sp>
-      <p:sp>
-        <p:nvSpPr>
-          <p:cNvPr id="13" name="Text 11"/>
-          <p:cNvSpPr/>
-          <p:nvPr/>
-        </p:nvSpPr>
-        <p:spPr>
-          <a:xfrm>
-            <a:off x="8046720" y="4411980"/>
-            <a:ext cx="548640" cy="274320"/>
-          </a:xfrm>
-          <a:prstGeom prst="rect">
-            <a:avLst/>
-          </a:prstGeom>
-          <a:noFill/>
-          <a:ln/>
-        </p:spPr>
-        <p:txBody>
-          <a:bodyPr wrap="square" rtlCol="0" anchor="ctr"/>
-          <a:lstStyle/>
-          <a:p>
-            <a:pPr algn="r" indent="0" marL="0">
-              <a:buNone/>
-            </a:pPr>
-            <a:r>
-              <a:rPr lang="en-US" sz="1200" dirty="0">
-                <a:solidFill>
-                  <a:srgbClr val="595959"/>
-                </a:solidFill>
-                <a:latin typeface="Noto Sans JP" pitchFamily="34" charset="0"/>
-                <a:ea typeface="Noto Sans JP" pitchFamily="34" charset="-122"/>
-                <a:cs typeface="Noto Sans JP" pitchFamily="34" charset="-120"/>
-              </a:rPr>
-              <a:t>06</a:t>
-            </a:r>
-            <a:endParaRPr lang="en-US" sz="1200" dirty="0"/>
-          </a:p>
-        </p:txBody>
-      </p:sp>
-    </p:spTree>
-  </p:cSld>
-  <p:clrMapOvr>
-    <a:masterClrMapping/>
-  </p:clrMapOvr>
-</p:sld>
-</file>
-
-<file path=ppt/slides/slide7.xml><?xml version="1.0" encoding="utf-8"?>
-<p:sld xmlns:a="http://schemas.openxmlformats.org/drawingml/2006/main" xmlns:r="http://schemas.openxmlformats.org/officeDocument/2006/relationships" xmlns:p="http://schemas.openxmlformats.org/presentationml/2006/main">
-  <p:cSld name="Slide 7">
-    <p:bg>
-      <p:bgPr>
-        <a:solidFill>
-          <a:srgbClr val="FFFFFF"/>
-        </a:solidFill>
-      </p:bgPr>
-    </p:bg>
-    <p:spTree>
-      <p:nvGrpSpPr>
-        <p:cNvPr id="1" name=""/>
-        <p:cNvGrpSpPr/>
-        <p:nvPr/>
-      </p:nvGrpSpPr>
-      <p:grpSpPr>
-        <a:xfrm>
-          <a:off x="0" y="0"/>
-          <a:ext cx="0" cy="0"/>
-          <a:chOff x="0" y="0"/>
-          <a:chExt cx="0" cy="0"/>
-        </a:xfrm>
-      </p:grpSpPr>
-      <p:sp>
-        <p:nvSpPr>
-          <p:cNvPr id="2" name="Shape 0"/>
-          <p:cNvSpPr/>
-          <p:nvPr/>
-        </p:nvSpPr>
-        <p:spPr>
-          <a:xfrm>
-            <a:off x="0" y="0"/>
-            <a:ext cx="3291840" cy="5143500"/>
-          </a:xfrm>
-          <a:prstGeom prst="rect">
-            <a:avLst/>
-          </a:prstGeom>
-          <a:solidFill>
-            <a:srgbClr val="15803D"/>
-          </a:solidFill>
-          <a:ln/>
-        </p:spPr>
-      </p:sp>
-      <p:sp>
-        <p:nvSpPr>
-          <p:cNvPr id="3" name="Text 1"/>
-          <p:cNvSpPr/>
-          <p:nvPr/>
-        </p:nvSpPr>
-        <p:spPr>
-          <a:xfrm>
-            <a:off x="457200" y="1543050"/>
-            <a:ext cx="2377440" cy="640080"/>
-          </a:xfrm>
-          <a:prstGeom prst="rect">
-            <a:avLst/>
-          </a:prstGeom>
-          <a:noFill/>
-          <a:ln/>
-        </p:spPr>
-        <p:txBody>
-          <a:bodyPr wrap="square" rtlCol="0" anchor="ctr"/>
-          <a:lstStyle/>
-          <a:p>
-            <a:pPr indent="0" marL="0">
-              <a:buNone/>
-            </a:pPr>
-            <a:r>
-              <a:rPr lang="en-US" sz="2400" b="1" dirty="0">
-                <a:solidFill>
-                  <a:srgbClr val="FFFFFF"/>
-                </a:solidFill>
-                <a:latin typeface="Noto Sans JP" pitchFamily="34" charset="0"/>
-                <a:ea typeface="Noto Sans JP" pitchFamily="34" charset="-122"/>
-                <a:cs typeface="Noto Sans JP" pitchFamily="34" charset="-120"/>
-              </a:rPr>
-              <a:t>テキスト+画像</a:t>
-            </a:r>
-            <a:endParaRPr lang="en-US" sz="2400" dirty="0"/>
-          </a:p>
-        </p:txBody>
-      </p:sp>
-      <p:sp>
-        <p:nvSpPr>
-          <p:cNvPr id="4" name="Text 2"/>
-          <p:cNvSpPr/>
-          <p:nvPr/>
-        </p:nvSpPr>
-        <p:spPr>
-          <a:xfrm>
-            <a:off x="457200" y="2228850"/>
-            <a:ext cx="2377440" cy="2314575"/>
-          </a:xfrm>
-          <a:prstGeom prst="rect">
-            <a:avLst/>
-          </a:prstGeom>
-          <a:noFill/>
-          <a:ln/>
-        </p:spPr>
-        <p:txBody>
-          <a:bodyPr wrap="square" rtlCol="0" anchor="t"/>
-          <a:lstStyle/>
-          <a:p>
-            <a:pPr marL="228600" indent="-228600">
-              <a:spcAft>
-                <a:spcPts val="800"/>
-              </a:spcAft>
-              <a:buSzPct val="100000"/>
-              <a:buChar char="•"/>
-            </a:pPr>
-            <a:r>
-              <a:rPr lang="en-US" sz="1400" dirty="0">
-                <a:solidFill>
-                  <a:srgbClr val="FFFFFF"/>
-                </a:solidFill>
-                <a:latin typeface="Noto Sans JP" pitchFamily="34" charset="0"/>
-                <a:ea typeface="Noto Sans JP" pitchFamily="34" charset="-122"/>
-                <a:cs typeface="Noto Sans JP" pitchFamily="34" charset="-120"/>
-              </a:rPr>
-              <a:t>画像を大きく、テキストは短く要点だけ</a:t>
-            </a:r>
-            <a:endParaRPr lang="en-US" sz="1400" dirty="0"/>
-          </a:p>
-          <a:p>
-            <a:pPr marL="228600" indent="-228600">
-              <a:spcAft>
-                <a:spcPts val="800"/>
-              </a:spcAft>
-              <a:buSzPct val="100000"/>
-              <a:buChar char="•"/>
-            </a:pPr>
-            <a:r>
-              <a:rPr lang="en-US" sz="1400" dirty="0">
-                <a:solidFill>
-                  <a:srgbClr val="FFFFFF"/>
-                </a:solidFill>
-                <a:latin typeface="Noto Sans JP" pitchFamily="34" charset="0"/>
-                <a:ea typeface="Noto Sans JP" pitchFamily="34" charset="-122"/>
-                <a:cs typeface="Noto Sans JP" pitchFamily="34" charset="-120"/>
-              </a:rPr>
-              <a:t>非対称ペアとして扱う</a:t>
-            </a:r>
-            <a:endParaRPr lang="en-US" sz="1400" dirty="0"/>
-          </a:p>
-        </p:txBody>
-      </p:sp>
-      <p:sp>
-        <p:nvSpPr>
-          <p:cNvPr id="5" name="Shape 3"/>
-          <p:cNvSpPr/>
-          <p:nvPr/>
-        </p:nvSpPr>
-        <p:spPr>
-          <a:xfrm>
-            <a:off x="3291840" y="0"/>
-            <a:ext cx="5852160" cy="5143500"/>
-          </a:xfrm>
-          <a:prstGeom prst="rect">
-            <a:avLst/>
-          </a:prstGeom>
-          <a:solidFill>
-            <a:srgbClr val="F3F3F3"/>
-          </a:solidFill>
-          <a:ln w="15875">
-            <a:solidFill>
-              <a:srgbClr val="D9D9D9"/>
-            </a:solidFill>
-            <a:prstDash val="dash"/>
-          </a:ln>
-        </p:spPr>
-      </p:sp>
-      <p:sp>
-        <p:nvSpPr>
-          <p:cNvPr id="6" name="Text 4"/>
-          <p:cNvSpPr/>
-          <p:nvPr/>
-        </p:nvSpPr>
-        <p:spPr>
-          <a:xfrm>
-            <a:off x="3291840" y="0"/>
-            <a:ext cx="5852160" cy="5143500"/>
-          </a:xfrm>
-          <a:prstGeom prst="rect">
-            <a:avLst/>
-          </a:prstGeom>
-          <a:noFill/>
-          <a:ln/>
-        </p:spPr>
-        <p:txBody>
-          <a:bodyPr wrap="square" rtlCol="0" anchor="ctr"/>
-          <a:lstStyle/>
-          <a:p>
-            <a:pPr algn="ctr" indent="0" marL="0">
-              <a:buNone/>
-            </a:pPr>
-            <a:r>
-              <a:rPr lang="en-US" sz="1400" dirty="0">
-                <a:solidFill>
-                  <a:srgbClr val="595959"/>
-                </a:solidFill>
-                <a:latin typeface="Noto Sans JP" pitchFamily="34" charset="0"/>
-                <a:ea typeface="Noto Sans JP" pitchFamily="34" charset="-122"/>
-                <a:cs typeface="Noto Sans JP" pitchFamily="34" charset="-120"/>
-              </a:rPr>
-              <a:t>IMAGE PLACEHOLDER</a:t>
-            </a:r>
-            <a:endParaRPr lang="en-US" sz="1400" dirty="0"/>
-          </a:p>
-        </p:txBody>
-      </p:sp>
-      <p:sp>
-        <p:nvSpPr>
-          <p:cNvPr id="7" name="Text 5"/>
-          <p:cNvSpPr/>
-          <p:nvPr/>
-        </p:nvSpPr>
-        <p:spPr>
-          <a:xfrm>
-            <a:off x="8046720" y="4411980"/>
-            <a:ext cx="548640" cy="274320"/>
-          </a:xfrm>
-          <a:prstGeom prst="rect">
-            <a:avLst/>
-          </a:prstGeom>
-          <a:noFill/>
-          <a:ln/>
-        </p:spPr>
-        <p:txBody>
-          <a:bodyPr wrap="square" rtlCol="0" anchor="ctr"/>
-          <a:lstStyle/>
-          <a:p>
-            <a:pPr algn="r" indent="0" marL="0">
-              <a:buNone/>
-            </a:pPr>
-            <a:r>
-              <a:rPr lang="en-US" sz="1200" dirty="0">
-                <a:solidFill>
-                  <a:srgbClr val="595959"/>
-                </a:solidFill>
-                <a:latin typeface="Noto Sans JP" pitchFamily="34" charset="0"/>
-                <a:ea typeface="Noto Sans JP" pitchFamily="34" charset="-122"/>
-                <a:cs typeface="Noto Sans JP" pitchFamily="34" charset="-120"/>
-              </a:rPr>
-              <a:t>07</a:t>
-            </a:r>
-            <a:endParaRPr lang="en-US" sz="1200" dirty="0"/>
-          </a:p>
-        </p:txBody>
-      </p:sp>
-    </p:spTree>
-  </p:cSld>
-  <p:clrMapOvr>
-    <a:masterClrMapping/>
-  </p:clrMapOvr>
-</p:sld>
-</file>
-
-<file path=ppt/slides/slide8.xml><?xml version="1.0" encoding="utf-8"?>
-<p:sld xmlns:a="http://schemas.openxmlformats.org/drawingml/2006/main" xmlns:r="http://schemas.openxmlformats.org/officeDocument/2006/relationships" xmlns:p="http://schemas.openxmlformats.org/presentationml/2006/main">
-  <p:cSld name="Slide 8">
     <p:bg>
       <p:bgPr>
         <a:solidFill>
